--- a/Presentaciones/best_equipo_08.pptx
+++ b/Presentaciones/best_equipo_08.pptx
@@ -5,11 +5,14 @@
     <p:sldMasterId id="2147483648" r:id="rId1"/>
   </p:sldMasterIdLst>
   <p:notesMasterIdLst>
-    <p:notesMasterId r:id="rId4"/>
+    <p:notesMasterId r:id="rId7"/>
   </p:notesMasterIdLst>
   <p:sldIdLst>
     <p:sldId id="264" r:id="rId2"/>
-    <p:sldId id="265" r:id="rId3"/>
+    <p:sldId id="266" r:id="rId3"/>
+    <p:sldId id="268" r:id="rId4"/>
+    <p:sldId id="265" r:id="rId5"/>
+    <p:sldId id="267" r:id="rId6"/>
   </p:sldIdLst>
   <p:sldSz cx="9144000" cy="6858000" type="screen4x3"/>
   <p:notesSz cx="6858000" cy="9144000"/>
@@ -281,7 +284,7 @@
               <a:pPr>
                 <a:defRPr/>
               </a:pPr>
-              <a:t>18/10/2025</a:t>
+              <a:t>20/10/2025</a:t>
             </a:fld>
             <a:endParaRPr lang="es-CO"/>
           </a:p>
@@ -713,7 +716,7 @@
                 <a:spcPct val="0"/>
               </a:spcBef>
             </a:pPr>
-            <a:endParaRPr lang="es-CO" altLang="es-CO" smtClean="0"/>
+            <a:endParaRPr lang="es-CO" altLang="es-CO"/>
           </a:p>
         </p:txBody>
       </p:sp>
@@ -879,7 +882,7 @@
               </a:pPr>
               <a:t>1</a:t>
             </a:fld>
-            <a:endParaRPr lang="es-CO" altLang="es-CO" smtClean="0"/>
+            <a:endParaRPr lang="es-CO" altLang="es-CO"/>
           </a:p>
         </p:txBody>
       </p:sp>
@@ -3414,30 +3417,22 @@
               <a:rPr lang="es-CO" altLang="es-CO" dirty="0"/>
             </a:br>
             <a:r>
-              <a:rPr lang="es-CO" altLang="es-CO" dirty="0" smtClean="0"/>
+              <a:rPr lang="es-CO" altLang="es-CO" dirty="0"/>
               <a:t>LAURA DANIELA DIAZ TORRES</a:t>
-            </a:r>
-            <a:br>
-              <a:rPr lang="es-CO" altLang="es-CO" dirty="0" smtClean="0"/>
-            </a:br>
-            <a:r>
-              <a:rPr lang="es-CO" altLang="es-CO" dirty="0" smtClean="0"/>
-              <a:t>CRISTIAN FELIPE MUÑOZ </a:t>
-            </a:r>
-            <a:r>
-              <a:rPr lang="es-CO" altLang="es-CO" dirty="0"/>
-              <a:t>GUERRERO</a:t>
             </a:r>
             <a:br>
               <a:rPr lang="es-CO" altLang="es-CO" dirty="0"/>
             </a:br>
             <a:r>
               <a:rPr lang="es-CO" altLang="es-CO" dirty="0"/>
-              <a:t>ZENNETH OLIVERO </a:t>
-            </a:r>
-            <a:r>
-              <a:rPr lang="es-CO" altLang="es-CO" dirty="0" smtClean="0"/>
-              <a:t>TAPIA</a:t>
+              <a:t>CRISTIAN FELIPE MUÑOZ GUERRERO</a:t>
+            </a:r>
+            <a:br>
+              <a:rPr lang="es-CO" altLang="es-CO" dirty="0"/>
+            </a:br>
+            <a:r>
+              <a:rPr lang="es-CO" altLang="es-CO" dirty="0"/>
+              <a:t>ZENNETH OLIVERO TAPIA</a:t>
             </a:r>
           </a:p>
         </p:txBody>
@@ -3466,7 +3461,7 @@
         </p:spPr>
         <p:txBody>
           <a:bodyPr rtlCol="0">
-            <a:normAutofit/>
+            <a:normAutofit lnSpcReduction="10000"/>
           </a:bodyPr>
           <a:lstStyle/>
           <a:p>
@@ -3477,63 +3472,26 @@
               <a:defRPr/>
             </a:pPr>
             <a:r>
-              <a:rPr lang="es-CO" b="1" dirty="0" err="1" smtClean="0"/>
+              <a:rPr lang="es-CO" b="1" dirty="0" err="1"/>
               <a:t>Problem</a:t>
             </a:r>
             <a:r>
-              <a:rPr lang="es-CO" b="1" dirty="0" smtClean="0"/>
+              <a:rPr lang="es-CO" b="1" dirty="0"/>
               <a:t> Set 2 – </a:t>
             </a:r>
             <a:r>
-              <a:rPr lang="es-CO" b="1" dirty="0" err="1" smtClean="0"/>
+              <a:rPr lang="es-CO" b="1" dirty="0" err="1"/>
               <a:t>Predicting</a:t>
             </a:r>
             <a:r>
-              <a:rPr lang="es-CO" b="1" dirty="0" smtClean="0"/>
+              <a:rPr lang="es-CO" b="1" dirty="0"/>
               <a:t> </a:t>
             </a:r>
             <a:r>
-              <a:rPr lang="es-CO" b="1" dirty="0" err="1" smtClean="0"/>
+              <a:rPr lang="es-CO" b="1" dirty="0" err="1"/>
               <a:t>Poverty</a:t>
             </a:r>
             <a:endParaRPr lang="es-CO" b="1" dirty="0"/>
-          </a:p>
-          <a:p>
-            <a:pPr eaLnBrk="1" fontAlgn="auto" hangingPunct="1">
-              <a:spcAft>
-                <a:spcPts val="0"/>
-              </a:spcAft>
-              <a:defRPr/>
-            </a:pPr>
-            <a:endParaRPr lang="es-CO" b="1" dirty="0" smtClean="0"/>
-          </a:p>
-          <a:p>
-            <a:pPr eaLnBrk="1" fontAlgn="auto" hangingPunct="1">
-              <a:spcAft>
-                <a:spcPts val="0"/>
-              </a:spcAft>
-              <a:defRPr/>
-            </a:pPr>
-            <a:r>
-              <a:rPr lang="es-CO" b="1" dirty="0" smtClean="0"/>
-              <a:t>BIG </a:t>
-            </a:r>
-            <a:r>
-              <a:rPr lang="es-CO" b="1" dirty="0"/>
-              <a:t>DATA Y MACHINE LEARNING PARA ECONOMIA APLICADA</a:t>
-            </a:r>
-          </a:p>
-          <a:p>
-            <a:pPr eaLnBrk="1" fontAlgn="auto" hangingPunct="1">
-              <a:spcAft>
-                <a:spcPts val="0"/>
-              </a:spcAft>
-              <a:defRPr/>
-            </a:pPr>
-            <a:r>
-              <a:rPr lang="es-CO" b="1" dirty="0" smtClean="0"/>
-              <a:t>2025-02</a:t>
-            </a:r>
           </a:p>
           <a:p>
             <a:pPr eaLnBrk="1" fontAlgn="auto" hangingPunct="1">
@@ -3552,8 +3510,8 @@
               <a:defRPr/>
             </a:pPr>
             <a:r>
-              <a:rPr lang="es-CO" dirty="0" smtClean="0"/>
-              <a:t>data_equipo_08</a:t>
+              <a:rPr lang="es-CO" b="1" dirty="0"/>
+              <a:t>BIG DATA Y MACHINE LEARNING PARA ECONOMIA APLICADA</a:t>
             </a:r>
           </a:p>
           <a:p>
@@ -3564,10 +3522,54 @@
               <a:defRPr/>
             </a:pPr>
             <a:r>
-              <a:rPr lang="es-CO" b="1" dirty="0" smtClean="0"/>
-              <a:t>Limpieza de datos, transformación de variables, definición de bases de datos finales.</a:t>
-            </a:r>
+              <a:rPr lang="es-CO" b="1" dirty="0"/>
+              <a:t>2025-02</a:t>
+            </a:r>
+          </a:p>
+          <a:p>
+            <a:pPr eaLnBrk="1" fontAlgn="auto" hangingPunct="1">
+              <a:spcAft>
+                <a:spcPts val="0"/>
+              </a:spcAft>
+              <a:defRPr/>
+            </a:pPr>
             <a:endParaRPr lang="es-CO" b="1" dirty="0"/>
+          </a:p>
+          <a:p>
+            <a:pPr eaLnBrk="1" fontAlgn="auto" hangingPunct="1">
+              <a:spcAft>
+                <a:spcPts val="0"/>
+              </a:spcAft>
+              <a:defRPr/>
+            </a:pPr>
+            <a:r>
+              <a:rPr lang="es-CO" dirty="0"/>
+              <a:t>data_equipo_08</a:t>
+            </a:r>
+          </a:p>
+          <a:p>
+            <a:pPr eaLnBrk="1" fontAlgn="auto" hangingPunct="1">
+              <a:spcAft>
+                <a:spcPts val="0"/>
+              </a:spcAft>
+              <a:defRPr/>
+            </a:pPr>
+            <a:r>
+              <a:rPr lang="es-CO" b="1" dirty="0"/>
+              <a:t>MEJOR MODELO ENSAMBLE (XGBOOST – CART)</a:t>
+            </a:r>
+          </a:p>
+          <a:p>
+            <a:pPr eaLnBrk="1" fontAlgn="auto" hangingPunct="1">
+              <a:spcAft>
+                <a:spcPts val="0"/>
+              </a:spcAft>
+              <a:defRPr/>
+            </a:pPr>
+            <a:r>
+              <a:rPr lang="es-CO" b="1" dirty="0"/>
+              <a:t>0.54</a:t>
+            </a:r>
           </a:p>
         </p:txBody>
       </p:sp>
@@ -3581,13 +3583,6 @@
   <p:clrMapOvr>
     <a:masterClrMapping/>
   </p:clrMapOvr>
-  <p:timing>
-    <p:tnLst>
-      <p:par>
-        <p:cTn id="1" dur="indefinite" restart="never" nodeType="tmRoot"/>
-      </p:par>
-    </p:tnLst>
-  </p:timing>
 </p:sld>
 </file>
 
@@ -3608,47 +3603,681 @@
           <a:chExt cx="0" cy="0"/>
         </a:xfrm>
       </p:grpSpPr>
+      <p:pic>
+        <p:nvPicPr>
+          <p:cNvPr id="5" name="Imagen 4">
+            <a:extLst>
+              <a:ext uri="{FF2B5EF4-FFF2-40B4-BE49-F238E27FC236}">
+                <a16:creationId xmlns:a16="http://schemas.microsoft.com/office/drawing/2014/main" id="{E6764B55-0F86-90CD-D38E-6E2CDCF5391D}"/>
+              </a:ext>
+            </a:extLst>
+          </p:cNvPr>
+          <p:cNvPicPr>
+            <a:picLocks noChangeAspect="1"/>
+          </p:cNvPicPr>
+          <p:nvPr/>
+        </p:nvPicPr>
+        <p:blipFill>
+          <a:blip r:embed="rId2">
+            <a:extLst>
+              <a:ext uri="{28A0092B-C50C-407E-A947-70E740481C1C}">
+                <a14:useLocalDpi xmlns:a14="http://schemas.microsoft.com/office/drawing/2010/main" val="0"/>
+              </a:ext>
+            </a:extLst>
+          </a:blip>
+          <a:stretch>
+            <a:fillRect/>
+          </a:stretch>
+        </p:blipFill>
+        <p:spPr>
+          <a:xfrm>
+            <a:off x="827584" y="3645024"/>
+            <a:ext cx="8176800" cy="2448272"/>
+          </a:xfrm>
+          <a:prstGeom prst="rect">
+            <a:avLst/>
+          </a:prstGeom>
+        </p:spPr>
+      </p:pic>
       <p:sp>
         <p:nvSpPr>
-          <p:cNvPr id="5122" name="Título 1"/>
-          <p:cNvSpPr>
-            <a:spLocks noGrp="1"/>
-          </p:cNvSpPr>
-          <p:nvPr>
-            <p:ph type="title"/>
-          </p:nvPr>
+          <p:cNvPr id="6" name="CuadroTexto 5">
+            <a:extLst>
+              <a:ext uri="{FF2B5EF4-FFF2-40B4-BE49-F238E27FC236}">
+                <a16:creationId xmlns:a16="http://schemas.microsoft.com/office/drawing/2014/main" id="{C4399D47-E4BB-B304-EB39-9AD9BFE3F47E}"/>
+              </a:ext>
+            </a:extLst>
+          </p:cNvPr>
+          <p:cNvSpPr txBox="1"/>
+          <p:nvPr/>
         </p:nvSpPr>
         <p:spPr>
           <a:xfrm>
-            <a:off x="1042988" y="981075"/>
-            <a:ext cx="8229600" cy="500063"/>
+            <a:off x="755576" y="2204864"/>
+            <a:ext cx="8176800" cy="1477328"/>
           </a:xfrm>
+          <a:prstGeom prst="rect">
+            <a:avLst/>
+          </a:prstGeom>
+          <a:noFill/>
         </p:spPr>
         <p:txBody>
-          <a:bodyPr/>
+          <a:bodyPr wrap="square" rtlCol="0">
+            <a:spAutoFit/>
+          </a:bodyPr>
           <a:lstStyle/>
           <a:p>
-            <a:pPr algn="ctr"/>
-            <a:endParaRPr lang="es-CO" altLang="es-CO" dirty="0" smtClean="0"/>
+            <a:pPr marL="285750" indent="-285750">
+              <a:buFont typeface="Arial" panose="020B0604020202020204" pitchFamily="34" charset="0"/>
+              <a:buChar char="•"/>
+            </a:pPr>
+            <a:r>
+              <a:rPr lang="es-MX" dirty="0"/>
+              <a:t>El objetivo fue </a:t>
+            </a:r>
+            <a:r>
+              <a:rPr lang="es-MX" b="1" dirty="0"/>
+              <a:t>reducir la varianza</a:t>
+            </a:r>
+            <a:r>
+              <a:rPr lang="es-MX" dirty="0"/>
+              <a:t> y </a:t>
+            </a:r>
+            <a:r>
+              <a:rPr lang="es-MX" b="1" dirty="0"/>
+              <a:t>mejorar la estabilidad</a:t>
+            </a:r>
+            <a:r>
+              <a:rPr lang="es-MX" dirty="0"/>
+              <a:t> de las predicciones frente al desbalance de clases (</a:t>
+            </a:r>
+            <a:r>
+              <a:rPr lang="es-MX" i="1" dirty="0"/>
+              <a:t>Pobre: 20%, </a:t>
+            </a:r>
+            <a:r>
+              <a:rPr lang="es-MX" i="1" dirty="0" err="1"/>
+              <a:t>NoPobre</a:t>
+            </a:r>
+            <a:r>
+              <a:rPr lang="es-MX" i="1" dirty="0"/>
+              <a:t>: 80%</a:t>
+            </a:r>
+            <a:r>
+              <a:rPr lang="es-MX" dirty="0"/>
+              <a:t>).</a:t>
+            </a:r>
+          </a:p>
+          <a:p>
+            <a:pPr marL="285750" indent="-285750">
+              <a:buFont typeface="Arial" panose="020B0604020202020204" pitchFamily="34" charset="0"/>
+              <a:buChar char="•"/>
+            </a:pPr>
+            <a:r>
+              <a:rPr lang="es-CO" dirty="0"/>
+              <a:t>Se entrenó con </a:t>
+            </a:r>
+            <a:r>
+              <a:rPr lang="es-CO" b="1" dirty="0"/>
+              <a:t>validación cruzada estratificada</a:t>
+            </a:r>
+            <a:r>
+              <a:rPr lang="es-CO" dirty="0"/>
+              <a:t> (5-fold para XGB, 3-fold para CART) y ponderación de clases</a:t>
+            </a:r>
+          </a:p>
+          <a:p>
+            <a:pPr marL="285750" indent="-285750">
+              <a:buFont typeface="Arial" panose="020B0604020202020204" pitchFamily="34" charset="0"/>
+              <a:buChar char="•"/>
+            </a:pPr>
+            <a:endParaRPr lang="es-CO" dirty="0"/>
           </a:p>
         </p:txBody>
       </p:sp>
-      <p:sp>
-        <p:nvSpPr>
-          <p:cNvPr id="2" name="Marcador de contenido 1"/>
-          <p:cNvSpPr>
-            <a:spLocks noGrp="1"/>
-          </p:cNvSpPr>
+    </p:spTree>
+    <p:extLst>
+      <p:ext uri="{BB962C8B-B14F-4D97-AF65-F5344CB8AC3E}">
+        <p14:creationId xmlns:p14="http://schemas.microsoft.com/office/powerpoint/2010/main" val="2266962237"/>
+      </p:ext>
+    </p:extLst>
+  </p:cSld>
+  <p:clrMapOvr>
+    <a:masterClrMapping/>
+  </p:clrMapOvr>
+</p:sld>
+</file>
+
+<file path=ppt/slides/slide3.xml><?xml version="1.0" encoding="utf-8"?>
+<p:sld xmlns:a="http://schemas.openxmlformats.org/drawingml/2006/main" xmlns:r="http://schemas.openxmlformats.org/officeDocument/2006/relationships" xmlns:p="http://schemas.openxmlformats.org/presentationml/2006/main">
+  <p:cSld>
+    <p:spTree>
+      <p:nvGrpSpPr>
+        <p:cNvPr id="1" name=""/>
+        <p:cNvGrpSpPr/>
+        <p:nvPr/>
+      </p:nvGrpSpPr>
+      <p:grpSpPr>
+        <a:xfrm>
+          <a:off x="0" y="0"/>
+          <a:ext cx="0" cy="0"/>
+          <a:chOff x="0" y="0"/>
+          <a:chExt cx="0" cy="0"/>
+        </a:xfrm>
+      </p:grpSpPr>
+      <mc:AlternateContent xmlns:mc="http://schemas.openxmlformats.org/markup-compatibility/2006">
+        <mc:Choice xmlns:a14="http://schemas.microsoft.com/office/drawing/2010/main" Requires="a14">
+          <p:sp>
+            <p:nvSpPr>
+              <p:cNvPr id="3" name="Marcador de contenido 2">
+                <a:extLst>
+                  <a:ext uri="{FF2B5EF4-FFF2-40B4-BE49-F238E27FC236}">
+                    <a16:creationId xmlns:a16="http://schemas.microsoft.com/office/drawing/2014/main" id="{346CC9CF-3B4E-D5D7-EF51-197780FA79CC}"/>
+                  </a:ext>
+                </a:extLst>
+              </p:cNvPr>
+              <p:cNvSpPr>
+                <a:spLocks noGrp="1"/>
+              </p:cNvSpPr>
+              <p:nvPr>
+                <p:ph idx="1"/>
+              </p:nvPr>
+            </p:nvSpPr>
+            <p:spPr>
+              <a:xfrm>
+                <a:off x="755576" y="1916832"/>
+                <a:ext cx="8424936" cy="4176464"/>
+              </a:xfrm>
+            </p:spPr>
+            <p:txBody>
+              <a:bodyPr/>
+              <a:lstStyle/>
+              <a:p>
+                <a:pPr marL="0" indent="0">
+                  <a:buNone/>
+                </a:pPr>
+                <a:r>
+                  <a:rPr lang="es-CO" sz="1600" b="1" dirty="0"/>
+                  <a:t>Razonamiento detrás del ensamble </a:t>
+                </a:r>
+                <a:r>
+                  <a:rPr lang="es-CO" sz="1600" b="1" dirty="0" err="1"/>
+                  <a:t>XGBoost</a:t>
+                </a:r>
+                <a:r>
+                  <a:rPr lang="es-CO" sz="1600" b="1" dirty="0"/>
+                  <a:t> + CART</a:t>
+                </a:r>
+              </a:p>
+              <a:p>
+                <a:r>
+                  <a:rPr lang="es-CO" sz="1600" b="1" dirty="0"/>
+                  <a:t>Motivación principal:</a:t>
+                </a:r>
+                <a:br>
+                  <a:rPr lang="es-CO" sz="1600" dirty="0"/>
+                </a:br>
+                <a:r>
+                  <a:rPr lang="es-CO" sz="1600" dirty="0" err="1"/>
+                  <a:t>XGBoost</a:t>
+                </a:r>
+                <a:r>
+                  <a:rPr lang="es-CO" sz="1600" dirty="0"/>
+                  <a:t> es un modelo altamente predictivo pero complejo (poca interpretabilidad), mientras que CART es simple y transparente pero con menor capacidad predictiva.</a:t>
+                </a:r>
+              </a:p>
+              <a:p>
+                <a:pPr marL="0" indent="0">
+                  <a:buNone/>
+                </a:pPr>
+                <a:br>
+                  <a:rPr lang="es-CO" sz="1600" dirty="0"/>
+                </a:br>
+                <a:r>
+                  <a:rPr lang="es-CO" sz="1600" b="1" dirty="0"/>
+                  <a:t>Combinarlos permite equilibrar precisión y </a:t>
+                </a:r>
+                <a:r>
+                  <a:rPr lang="es-CO" sz="1600" b="1" dirty="0" err="1"/>
+                  <a:t>explicabilidad</a:t>
+                </a:r>
+                <a:endParaRPr lang="es-CO" sz="1600" b="1" dirty="0"/>
+              </a:p>
+              <a:p>
+                <a:pPr marL="0" indent="0">
+                  <a:buNone/>
+                </a:pPr>
+                <a:endParaRPr lang="es-CO" sz="1600" dirty="0"/>
+              </a:p>
+              <a:p>
+                <a:r>
+                  <a:rPr lang="es-CO" sz="1600" b="1" dirty="0"/>
+                  <a:t>Complementariedad estructural:</a:t>
+                </a:r>
+                <a:endParaRPr lang="es-CO" sz="1600" dirty="0"/>
+              </a:p>
+              <a:p>
+                <a:pPr lvl="1"/>
+                <a:r>
+                  <a:rPr lang="es-CO" sz="1600" b="1" dirty="0" err="1"/>
+                  <a:t>XGBoost</a:t>
+                </a:r>
+                <a:r>
+                  <a:rPr lang="es-CO" sz="1600" dirty="0"/>
+                  <a:t> reduce el sesgo mediante </a:t>
+                </a:r>
+                <a:r>
+                  <a:rPr lang="es-CO" sz="1600" i="1" dirty="0" err="1"/>
+                  <a:t>boosting</a:t>
+                </a:r>
+                <a:r>
+                  <a:rPr lang="es-CO" sz="1600" i="1" dirty="0"/>
+                  <a:t> secuencial</a:t>
+                </a:r>
+                <a:r>
+                  <a:rPr lang="es-CO" sz="1600" dirty="0"/>
+                  <a:t>, capturando relaciones no lineales y complejas.</a:t>
+                </a:r>
+              </a:p>
+              <a:p>
+                <a:pPr lvl="1"/>
+                <a:r>
+                  <a:rPr lang="es-CO" sz="1600" b="1" dirty="0"/>
+                  <a:t>CART</a:t>
+                </a:r>
+                <a:r>
+                  <a:rPr lang="es-CO" sz="1600" dirty="0"/>
+                  <a:t> reduce la varianza al ser un modelo único, interpretable y con divisiones claras</a:t>
+                </a:r>
+              </a:p>
+              <a:p>
+                <a:pPr lvl="1"/>
+                <a:endParaRPr lang="es-CO" sz="1600" b="1" dirty="0"/>
+              </a:p>
+              <a:p>
+                <a:pPr marL="457200" lvl="1" indent="0">
+                  <a:buNone/>
+                </a:pPr>
+                <a:r>
+                  <a:rPr lang="es-CO" sz="1600" b="1" dirty="0"/>
+                  <a:t>Motivo técnico:</a:t>
+                </a:r>
+                <a:endParaRPr lang="es-CO" sz="1600" dirty="0"/>
+              </a:p>
+              <a:p>
+                <a:pPr marL="0" indent="0">
+                  <a:buNone/>
+                </a:pPr>
+                <a14:m>
+                  <m:oMathPara xmlns:m="http://schemas.openxmlformats.org/officeDocument/2006/math">
+                    <m:oMathParaPr>
+                      <m:jc m:val="centerGroup"/>
+                    </m:oMathParaPr>
+                    <m:oMath xmlns:m="http://schemas.openxmlformats.org/officeDocument/2006/math">
+                      <m:sSub>
+                        <m:sSubPr>
+                          <m:ctrlPr>
+                            <a:rPr lang="ar-AE" sz="1600"/>
+                          </m:ctrlPr>
+                        </m:sSubPr>
+                        <m:e>
+                          <m:r>
+                            <a:rPr lang="ar-AE" sz="1600" i="1"/>
+                            <m:t>𝑃</m:t>
+                          </m:r>
+                        </m:e>
+                        <m:sub>
+                          <m:r>
+                            <m:rPr>
+                              <m:nor/>
+                            </m:rPr>
+                            <a:rPr lang="es-CO" sz="1600" i="1"/>
+                            <m:t>ensamble</m:t>
+                          </m:r>
+                        </m:sub>
+                      </m:sSub>
+                      <m:r>
+                        <a:rPr lang="ar-AE" sz="1600"/>
+                        <m:t>=</m:t>
+                      </m:r>
+                      <m:r>
+                        <a:rPr lang="ar-AE" sz="1600" i="1"/>
+                        <m:t>𝑤</m:t>
+                      </m:r>
+                      <m:r>
+                        <a:rPr lang="ar-AE" sz="1600"/>
+                        <m:t>⋅</m:t>
+                      </m:r>
+                      <m:sSub>
+                        <m:sSubPr>
+                          <m:ctrlPr>
+                            <a:rPr lang="ar-AE" sz="1600" i="1"/>
+                          </m:ctrlPr>
+                        </m:sSubPr>
+                        <m:e>
+                          <m:r>
+                            <a:rPr lang="ar-AE" sz="1600" i="1"/>
+                            <m:t>𝑃</m:t>
+                          </m:r>
+                        </m:e>
+                        <m:sub>
+                          <m:r>
+                            <a:rPr lang="ar-AE" sz="1600" i="1"/>
+                            <m:t>𝑋𝐺𝐵</m:t>
+                          </m:r>
+                        </m:sub>
+                      </m:sSub>
+                      <m:r>
+                        <a:rPr lang="ar-AE" sz="1600"/>
+                        <m:t>+</m:t>
+                      </m:r>
+                      <m:d>
+                        <m:dPr>
+                          <m:ctrlPr>
+                            <a:rPr lang="ar-AE" sz="1600" i="1"/>
+                          </m:ctrlPr>
+                        </m:dPr>
+                        <m:e>
+                          <m:r>
+                            <a:rPr lang="ar-AE" sz="1600"/>
+                            <m:t>1</m:t>
+                          </m:r>
+                          <m:r>
+                            <a:rPr lang="ar-AE" sz="1600"/>
+                            <m:t>−</m:t>
+                          </m:r>
+                          <m:r>
+                            <a:rPr lang="ar-AE" sz="1600" i="1"/>
+                            <m:t>𝑤</m:t>
+                          </m:r>
+                        </m:e>
+                      </m:d>
+                      <m:r>
+                        <a:rPr lang="ar-AE" sz="1600"/>
+                        <m:t>⋅</m:t>
+                      </m:r>
+                      <m:sSub>
+                        <m:sSubPr>
+                          <m:ctrlPr>
+                            <a:rPr lang="ar-AE" sz="1600" i="1"/>
+                          </m:ctrlPr>
+                        </m:sSubPr>
+                        <m:e>
+                          <m:r>
+                            <a:rPr lang="ar-AE" sz="1600" i="1"/>
+                            <m:t>𝑃</m:t>
+                          </m:r>
+                        </m:e>
+                        <m:sub>
+                          <m:r>
+                            <a:rPr lang="ar-AE" sz="1600" i="1"/>
+                            <m:t>𝐶𝐴𝑅𝑇</m:t>
+                          </m:r>
+                        </m:sub>
+                      </m:sSub>
+                    </m:oMath>
+                  </m:oMathPara>
+                </a14:m>
+                <a:endParaRPr lang="ar-AE" sz="1600" b="0" dirty="0"/>
+              </a:p>
+              <a:p>
+                <a:endParaRPr lang="es-CO" dirty="0"/>
+              </a:p>
+            </p:txBody>
+          </p:sp>
+        </mc:Choice>
+        <mc:Fallback>
+          <p:sp>
+            <p:nvSpPr>
+              <p:cNvPr id="3" name="Marcador de contenido 2">
+                <a:extLst>
+                  <a:ext uri="{FF2B5EF4-FFF2-40B4-BE49-F238E27FC236}">
+                    <a16:creationId xmlns:a16="http://schemas.microsoft.com/office/drawing/2014/main" id="{346CC9CF-3B4E-D5D7-EF51-197780FA79CC}"/>
+                  </a:ext>
+                </a:extLst>
+              </p:cNvPr>
+              <p:cNvSpPr>
+                <a:spLocks noGrp="1" noRot="1" noChangeAspect="1" noMove="1" noResize="1" noEditPoints="1" noAdjustHandles="1" noChangeArrowheads="1" noChangeShapeType="1" noTextEdit="1"/>
+              </p:cNvSpPr>
+              <p:nvPr>
+                <p:ph idx="1"/>
+              </p:nvPr>
+            </p:nvSpPr>
+            <p:spPr>
+              <a:xfrm>
+                <a:off x="755576" y="1916832"/>
+                <a:ext cx="8424936" cy="4176464"/>
+              </a:xfrm>
+              <a:blipFill>
+                <a:blip r:embed="rId2"/>
+                <a:stretch>
+                  <a:fillRect l="-434" t="-437" r="-868" b="-292"/>
+                </a:stretch>
+              </a:blipFill>
+            </p:spPr>
+            <p:txBody>
+              <a:bodyPr/>
+              <a:lstStyle/>
+              <a:p>
+                <a:r>
+                  <a:rPr lang="es-CO">
+                    <a:noFill/>
+                  </a:rPr>
+                  <a:t> </a:t>
+                </a:r>
+              </a:p>
+            </p:txBody>
+          </p:sp>
+        </mc:Fallback>
+      </mc:AlternateContent>
+    </p:spTree>
+    <p:extLst>
+      <p:ext uri="{BB962C8B-B14F-4D97-AF65-F5344CB8AC3E}">
+        <p14:creationId xmlns:p14="http://schemas.microsoft.com/office/powerpoint/2010/main" val="2258202685"/>
+      </p:ext>
+    </p:extLst>
+  </p:cSld>
+  <p:clrMapOvr>
+    <a:masterClrMapping/>
+  </p:clrMapOvr>
+</p:sld>
+</file>
+
+<file path=ppt/slides/slide4.xml><?xml version="1.0" encoding="utf-8"?>
+<p:sld xmlns:a="http://schemas.openxmlformats.org/drawingml/2006/main" xmlns:r="http://schemas.openxmlformats.org/officeDocument/2006/relationships" xmlns:p="http://schemas.openxmlformats.org/presentationml/2006/main">
+  <p:cSld>
+    <p:spTree>
+      <p:nvGrpSpPr>
+        <p:cNvPr id="1" name=""/>
+        <p:cNvGrpSpPr/>
+        <p:nvPr/>
+      </p:nvGrpSpPr>
+      <p:grpSpPr>
+        <a:xfrm>
+          <a:off x="0" y="0"/>
+          <a:ext cx="0" cy="0"/>
+          <a:chOff x="0" y="0"/>
+          <a:chExt cx="0" cy="0"/>
+        </a:xfrm>
+      </p:grpSpPr>
+      <p:pic>
+        <p:nvPicPr>
+          <p:cNvPr id="4" name="Marcador de contenido 3">
+            <a:extLst>
+              <a:ext uri="{FF2B5EF4-FFF2-40B4-BE49-F238E27FC236}">
+                <a16:creationId xmlns:a16="http://schemas.microsoft.com/office/drawing/2014/main" id="{3B87F227-6905-4DCE-AE64-2AB556BDED1B}"/>
+              </a:ext>
+            </a:extLst>
+          </p:cNvPr>
+          <p:cNvPicPr>
+            <a:picLocks noGrp="1" noChangeAspect="1"/>
+          </p:cNvPicPr>
           <p:nvPr>
             <p:ph idx="1"/>
           </p:nvPr>
+        </p:nvPicPr>
+        <p:blipFill>
+          <a:blip r:embed="rId2">
+            <a:extLst>
+              <a:ext uri="{28A0092B-C50C-407E-A947-70E740481C1C}">
+                <a14:useLocalDpi xmlns:a14="http://schemas.microsoft.com/office/drawing/2010/main" val="0"/>
+              </a:ext>
+            </a:extLst>
+          </a:blip>
+          <a:stretch>
+            <a:fillRect/>
+          </a:stretch>
+        </p:blipFill>
+        <p:spPr>
+          <a:xfrm>
+            <a:off x="4698590" y="2132857"/>
+            <a:ext cx="4445409" cy="3384376"/>
+          </a:xfrm>
+        </p:spPr>
+      </p:pic>
+      <p:sp>
+        <p:nvSpPr>
+          <p:cNvPr id="13" name="CuadroTexto 12">
+            <a:extLst>
+              <a:ext uri="{FF2B5EF4-FFF2-40B4-BE49-F238E27FC236}">
+                <a16:creationId xmlns:a16="http://schemas.microsoft.com/office/drawing/2014/main" id="{9AC394BC-2E57-F734-4DAB-CE20424F2E2A}"/>
+              </a:ext>
+            </a:extLst>
+          </p:cNvPr>
+          <p:cNvSpPr txBox="1"/>
+          <p:nvPr/>
         </p:nvSpPr>
-        <p:spPr/>
+        <p:spPr>
+          <a:xfrm>
+            <a:off x="827584" y="1700808"/>
+            <a:ext cx="3888432" cy="3970318"/>
+          </a:xfrm>
+          <a:prstGeom prst="rect">
+            <a:avLst/>
+          </a:prstGeom>
+          <a:noFill/>
+        </p:spPr>
         <p:txBody>
-          <a:bodyPr/>
+          <a:bodyPr wrap="square" rtlCol="0">
+            <a:spAutoFit/>
+          </a:bodyPr>
           <a:lstStyle/>
           <a:p>
-            <a:endParaRPr lang="es-CO"/>
+            <a:r>
+              <a:rPr lang="es-CO" sz="1200" b="1" dirty="0" err="1"/>
+              <a:t>XGBoost</a:t>
+            </a:r>
+            <a:r>
+              <a:rPr lang="es-CO" sz="1200" b="1" dirty="0"/>
+              <a:t> – </a:t>
+            </a:r>
+            <a:r>
+              <a:rPr lang="es-CO" sz="1200" b="1" dirty="0" err="1"/>
+              <a:t>Grid</a:t>
+            </a:r>
+            <a:r>
+              <a:rPr lang="es-CO" sz="1200" b="1" dirty="0"/>
+              <a:t> </a:t>
+            </a:r>
+            <a:r>
+              <a:rPr lang="es-CO" sz="1200" b="1" dirty="0" err="1"/>
+              <a:t>Search</a:t>
+            </a:r>
+            <a:r>
+              <a:rPr lang="es-CO" sz="1200" b="1" dirty="0"/>
+              <a:t>:</a:t>
+            </a:r>
+          </a:p>
+          <a:p>
+            <a:r>
+              <a:rPr lang="es-CO" sz="1200" dirty="0"/>
+              <a:t>𝑛𝑟𝑜𝑢𝑛𝑑𝑠=600, 𝑚𝑎𝑥_𝑑𝑒𝑝𝑡ℎ=3–4, 𝜂=0.05, 𝛾=1, 𝑠𝑢𝑏𝑠𝑎𝑚𝑝𝑙𝑒=0.8, 𝑐𝑜𝑙𝑠𝑎𝑚𝑝𝑙𝑒_𝑏𝑦𝑡𝑟𝑒𝑒=0.7</a:t>
+            </a:r>
+          </a:p>
+          <a:p>
+            <a:endParaRPr lang="es-CO" sz="1200" dirty="0"/>
+          </a:p>
+          <a:p>
+            <a:r>
+              <a:rPr lang="es-CO" sz="1200" dirty="0"/>
+              <a:t>Árboles poco profundos → control del sobreajuste.</a:t>
+            </a:r>
+          </a:p>
+          <a:p>
+            <a:r>
+              <a:rPr lang="es-CO" sz="1200" dirty="0"/>
+              <a:t>Tasa de aprendizaje baja → entrenamiento estable.</a:t>
+            </a:r>
+          </a:p>
+          <a:p>
+            <a:r>
+              <a:rPr lang="es-CO" sz="1200" dirty="0"/>
+              <a:t>Submuestreo → mayor diversidad y regularización implícita.</a:t>
+            </a:r>
+          </a:p>
+          <a:p>
+            <a:endParaRPr lang="es-CO" sz="1200" dirty="0"/>
+          </a:p>
+          <a:p>
+            <a:r>
+              <a:rPr lang="es-CO" sz="1200" b="1" dirty="0"/>
+              <a:t>CART – Complejidad del árbol:</a:t>
+            </a:r>
+          </a:p>
+          <a:p>
+            <a:pPr algn="ctr"/>
+            <a:r>
+              <a:rPr lang="es-CO" sz="1200" dirty="0"/>
+              <a:t>𝑐𝑝∈[0.001,0.01]</a:t>
+            </a:r>
+          </a:p>
+          <a:p>
+            <a:endParaRPr lang="es-CO" sz="1200" dirty="0"/>
+          </a:p>
+          <a:p>
+            <a:r>
+              <a:rPr lang="es-CO" sz="1200" dirty="0" err="1"/>
+              <a:t>cp</a:t>
+            </a:r>
+            <a:r>
+              <a:rPr lang="es-CO" sz="1200" dirty="0"/>
+              <a:t>=0.001 fue el valor óptimo, equilibrando simplicidad e interpretabilidad.</a:t>
+            </a:r>
+          </a:p>
+          <a:p>
+            <a:r>
+              <a:rPr lang="es-CO" sz="1200" dirty="0"/>
+              <a:t>Poda efectiva: evita divisiones sin ganancia de información.</a:t>
+            </a:r>
+          </a:p>
+          <a:p>
+            <a:endParaRPr lang="es-CO" sz="1200" dirty="0"/>
+          </a:p>
+          <a:p>
+            <a:r>
+              <a:rPr lang="es-CO" sz="1200" b="1" dirty="0"/>
+              <a:t>Optimización conjunta:</a:t>
+            </a:r>
+          </a:p>
+          <a:p>
+            <a:r>
+              <a:rPr lang="es-CO" sz="1200" dirty="0"/>
+              <a:t>𝑤𝑋𝐺𝐵=0.9, 𝑐𝑢𝑡𝑜𝑓𝑓=0.556</a:t>
+            </a:r>
+          </a:p>
+          <a:p>
+            <a:r>
+              <a:rPr lang="es-CO" sz="1200" dirty="0"/>
+              <a:t>Máximo F1 = 0.547 → equilibrio entre precisión y </a:t>
+            </a:r>
+            <a:r>
+              <a:rPr lang="es-CO" sz="1200" dirty="0" err="1"/>
+              <a:t>recall</a:t>
+            </a:r>
+            <a:r>
+              <a:rPr lang="es-CO" sz="1200" dirty="0"/>
+              <a:t>.</a:t>
+            </a:r>
           </a:p>
         </p:txBody>
       </p:sp>
@@ -3662,13 +4291,124 @@
   <p:clrMapOvr>
     <a:masterClrMapping/>
   </p:clrMapOvr>
-  <p:timing>
-    <p:tnLst>
-      <p:par>
-        <p:cTn id="1" dur="indefinite" restart="never" nodeType="tmRoot"/>
-      </p:par>
-    </p:tnLst>
-  </p:timing>
+</p:sld>
+</file>
+
+<file path=ppt/slides/slide5.xml><?xml version="1.0" encoding="utf-8"?>
+<p:sld xmlns:a="http://schemas.openxmlformats.org/drawingml/2006/main" xmlns:r="http://schemas.openxmlformats.org/officeDocument/2006/relationships" xmlns:p="http://schemas.openxmlformats.org/presentationml/2006/main">
+  <p:cSld>
+    <p:spTree>
+      <p:nvGrpSpPr>
+        <p:cNvPr id="1" name=""/>
+        <p:cNvGrpSpPr/>
+        <p:nvPr/>
+      </p:nvGrpSpPr>
+      <p:grpSpPr>
+        <a:xfrm>
+          <a:off x="0" y="0"/>
+          <a:ext cx="0" cy="0"/>
+          <a:chOff x="0" y="0"/>
+          <a:chExt cx="0" cy="0"/>
+        </a:xfrm>
+      </p:grpSpPr>
+      <p:sp>
+        <p:nvSpPr>
+          <p:cNvPr id="3" name="Marcador de contenido 2">
+            <a:extLst>
+              <a:ext uri="{FF2B5EF4-FFF2-40B4-BE49-F238E27FC236}">
+                <a16:creationId xmlns:a16="http://schemas.microsoft.com/office/drawing/2014/main" id="{3E733A3D-81DA-1927-89E1-BF089A3A9C38}"/>
+              </a:ext>
+            </a:extLst>
+          </p:cNvPr>
+          <p:cNvSpPr>
+            <a:spLocks noGrp="1"/>
+          </p:cNvSpPr>
+          <p:nvPr>
+            <p:ph idx="1"/>
+          </p:nvPr>
+        </p:nvSpPr>
+        <p:spPr>
+          <a:xfrm>
+            <a:off x="1043608" y="1484784"/>
+            <a:ext cx="7858125" cy="4143375"/>
+          </a:xfrm>
+        </p:spPr>
+        <p:txBody>
+          <a:bodyPr/>
+          <a:lstStyle/>
+          <a:p>
+            <a:pPr marL="0" indent="0">
+              <a:buNone/>
+            </a:pPr>
+            <a:r>
+              <a:rPr lang="es-MX" b="1" dirty="0"/>
+              <a:t>Conclusiones</a:t>
+            </a:r>
+          </a:p>
+          <a:p>
+            <a:pPr marL="0" indent="0">
+              <a:buNone/>
+            </a:pPr>
+            <a:endParaRPr lang="es-MX" dirty="0"/>
+          </a:p>
+          <a:p>
+            <a:r>
+              <a:rPr lang="es-MX" dirty="0"/>
+              <a:t>Según los resultados de la validación cruzada interna, el ensamble mostró el mejor equilibrio entre precisión e interpretabilidad.</a:t>
+            </a:r>
+          </a:p>
+          <a:p>
+            <a:r>
+              <a:rPr lang="es-MX" dirty="0"/>
+              <a:t>La combinación de </a:t>
+            </a:r>
+            <a:r>
+              <a:rPr lang="es-MX" dirty="0" err="1"/>
+              <a:t>XGBoost</a:t>
+            </a:r>
+            <a:r>
+              <a:rPr lang="es-MX" dirty="0"/>
+              <a:t> y CART permitió reducir la varianza y mejorar la estabilidad de las predicciones, integrando potencia predictiva y capacidad explicativa.</a:t>
+            </a:r>
+          </a:p>
+          <a:p>
+            <a:r>
+              <a:rPr lang="es-MX" dirty="0"/>
+              <a:t>El uso del F1-score como métrica central alineó el proceso de ajuste con el objetivo del estudio: maximizar la detección de hogares pobres minimizando los falsos negativos.</a:t>
+            </a:r>
+          </a:p>
+          <a:p>
+            <a:r>
+              <a:rPr lang="es-MX" dirty="0"/>
+              <a:t>Aunque los resultados finales en el conjunto de prueba de </a:t>
+            </a:r>
+            <a:r>
+              <a:rPr lang="es-MX" dirty="0" err="1"/>
+              <a:t>Kaggle</a:t>
+            </a:r>
+            <a:r>
+              <a:rPr lang="es-MX" dirty="0"/>
+              <a:t> no son observables, el enfoque demostró ser robusto, replicable y extensible a nuevos modelos base.</a:t>
+            </a:r>
+          </a:p>
+          <a:p>
+            <a:pPr marL="0" indent="0">
+              <a:buNone/>
+            </a:pPr>
+            <a:endParaRPr lang="es-CO" dirty="0"/>
+          </a:p>
+        </p:txBody>
+      </p:sp>
+    </p:spTree>
+    <p:extLst>
+      <p:ext uri="{BB962C8B-B14F-4D97-AF65-F5344CB8AC3E}">
+        <p14:creationId xmlns:p14="http://schemas.microsoft.com/office/powerpoint/2010/main" val="3828104236"/>
+      </p:ext>
+    </p:extLst>
+  </p:cSld>
+  <p:clrMapOvr>
+    <a:masterClrMapping/>
+  </p:clrMapOvr>
 </p:sld>
 </file>
 
